--- a/docs/MeetingMiner-15-minute-capstone.pptx
+++ b/docs/MeetingMiner-15-minute-capstone.pptx
@@ -1155,25 +1155,61 @@
           <a:p/>
           <a:p>
             <a:r>
-              <a:t>PRIMARY QUESTION -- verified twice, stable, use this one:</a:t>
+              <a:t>NO QUESTION IS GUARANTEED. Measured over repeated runs on 2026-08-31: the DBE</a:t>
+            </a:r>
+          </a:p>
+          <a:p>
+            <a:r>
+              <a:t>question passed 3 of 4, heated sidewalks passed 3 of 4, and the citation gate</a:t>
+            </a:r>
+          </a:p>
+          <a:p>
+            <a:r>
+              <a:t>refuses roughly half of all reasonable questions. Have two loaded and be ready</a:t>
+            </a:r>
+          </a:p>
+          <a:p>
+            <a:r>
+              <a:t>to say what a refusal means. This is the single biggest live risk in the demo.</a:t>
             </a:r>
           </a:p>
           <a:p/>
           <a:p>
             <a:r>
+              <a:t>PRIMARY QUESTION -- best answer in the corpus, 3 of 4 runs:</a:t>
+            </a:r>
+          </a:p>
+          <a:p/>
+          <a:p>
+            <a:r>
               <a:t>    What is the DBE participation goal and how is it tracked?</a:t>
             </a:r>
           </a:p>
           <a:p/>
           <a:p>
             <a:r>
-              <a:t>Returns: the goal is 15%, they were around 22% as of October, and tracking was "on pause". One citation, and it carries a screenshot. Numbers, a caveat and a named pause -- a real answer.</a:t>
+              <a:t>Returns real numbers: the goal is 15%, they were around 22% as of October, and</a:t>
+            </a:r>
+          </a:p>
+          <a:p>
+            <a:r>
+              <a:t>tracking was "on pause". One citation, carrying a screenshot. Numbers, a caveat</a:t>
+            </a:r>
+          </a:p>
+          <a:p>
+            <a:r>
+              <a:t>and a named pause -- the kind of answer a person actually wanted. It also sets</a:t>
+            </a:r>
+          </a:p>
+          <a:p>
+            <a:r>
+              <a:t>up Arc 2, because DBE is a thread running through 8 meetings.</a:t>
             </a:r>
           </a:p>
           <a:p/>
           <a:p>
             <a:r>
-              <a:t>SECOND QUESTION -- verified twice, two citations, both with screenshots:</a:t>
+              <a:t>SECOND QUESTION -- 3 of 4 runs, two or three citations, all with screenshots:</a:t>
             </a:r>
           </a:p>
           <a:p/>
@@ -1185,25 +1221,48 @@
           <a:p/>
           <a:p>
             <a:r>
-              <a:t>Returns an actual exchange: someone asks whether heated sidewalks are going in at larger stations because ice is treacherous, and someone else answers that they considered it and did something on Central. Good because it shows a conversation, not a summary.</a:t>
+              <a:t>Returns a real exchange: someone asks whether heated sidewalks are going in at</a:t>
+            </a:r>
+          </a:p>
+          <a:p>
+            <a:r>
+              <a:t>the larger stations because ice is treacherous, and someone else answers that</a:t>
+            </a:r>
+          </a:p>
+          <a:p>
+            <a:r>
+              <a:t>they did consider it and did something on Central. Good because it shows a</a:t>
+            </a:r>
+          </a:p>
+          <a:p>
+            <a:r>
+              <a:t>conversation rather than a summary. Run this one if DBE refuses.</a:t>
             </a:r>
           </a:p>
           <a:p/>
           <a:p>
             <a:r>
-              <a:t>THIRD, if you want range -- verified, but the answer varies:</a:t>
-            </a:r>
-          </a:p>
-          <a:p/>
-          <a:p>
-            <a:r>
-              <a:t>    What is the outlook for reopening the Cedar Lake Trail?</a:t>
-            </a:r>
-          </a:p>
-          <a:p/>
-          <a:p>
-            <a:r>
-              <a:t>Sometimes returns three citations across three meetings spanning 2022 to 2025; sometimes one. Always passes. Use it if you want to show corpus-wide reach, but do not promise the three-citation version.</a:t>
+              <a:t>DO NOT USE -- "What is the outlook for reopening the Cedar Lake Trail?" It</a:t>
+            </a:r>
+          </a:p>
+          <a:p>
+            <a:r>
+              <a:t>passes the gate almost every time, but the answer is a hedge: "the moments</a:t>
+            </a:r>
+          </a:p>
+          <a:p>
+            <a:r>
+              <a:t>provided do not give a single definitive outlook date". Technically cited,</a:t>
+            </a:r>
+          </a:p>
+          <a:p>
+            <a:r>
+              <a:t>reads like a failure. Keep Cedar Lake for Arc 2, where the timeline is the</a:t>
+            </a:r>
+          </a:p>
+          <a:p>
+            <a:r>
+              <a:t>point, not the prose.</a:t>
             </a:r>
           </a:p>
           <a:p/>
@@ -7826,6 +7885,14 @@
 <file path=ppt/slides/slide3.xml><?xml version="1.0" encoding="utf-8"?>
 <p:sld xmlns:a="http://schemas.openxmlformats.org/drawingml/2006/main" xmlns:p="http://schemas.openxmlformats.org/presentationml/2006/main" xmlns:r="http://schemas.openxmlformats.org/officeDocument/2006/relationships">
   <p:cSld>
+    <p:bg>
+      <p:bgPr>
+        <a:solidFill>
+          <a:srgbClr val="081115"/>
+        </a:solidFill>
+        <a:effectLst/>
+      </p:bgPr>
+    </p:bg>
     <p:spTree>
       <p:nvGrpSpPr>
         <p:cNvPr id="1" name=""/>
@@ -7853,6 +7920,7 @@
           <a:ln>
             <a:noFill/>
           </a:ln>
+          <a:effectLst/>
         </p:spPr>
         <p:style>
           <a:lnRef idx="1">
@@ -7964,6 +8032,7 @@
           <a:ln>
             <a:noFill/>
           </a:ln>
+          <a:effectLst/>
         </p:spPr>
         <p:style>
           <a:lnRef idx="1">
@@ -8029,7 +8098,7 @@
         <p:spPr>
           <a:xfrm>
             <a:off x="722376" y="1353312"/>
-            <a:ext cx="10744200" cy="292608"/>
+            <a:ext cx="10744200" cy="274320"/>
           </a:xfrm>
           <a:prstGeom prst="rect">
             <a:avLst/>
@@ -8044,181 +8113,40 @@
           <a:p>
             <a:pPr algn="l"/>
             <a:r>
-              <a:rPr sz="1500" b="0">
+              <a:rPr sz="1400" b="0">
                 <a:solidFill>
                   <a:srgbClr val="8AA0A4"/>
                 </a:solidFill>
                 <a:latin typeface="Arial"/>
               </a:rPr>
-              <a:t>Four parts. Only one of them is allowed to be the truth.</a:t>
-            </a:r>
-          </a:p>
-        </p:txBody>
-      </p:sp>
-      <p:sp>
-        <p:nvSpPr>
-          <p:cNvPr id="8" name="TextBox 7"/>
-          <p:cNvSpPr txBox="1"/>
-          <p:nvPr/>
-        </p:nvSpPr>
-        <p:spPr>
-          <a:xfrm>
-            <a:off x="685800" y="1847088"/>
-            <a:ext cx="2468880" cy="210312"/>
-          </a:xfrm>
-          <a:prstGeom prst="rect">
-            <a:avLst/>
-          </a:prstGeom>
-          <a:noFill/>
-        </p:spPr>
-        <p:txBody>
-          <a:bodyPr wrap="square" lIns="0" rIns="0" tIns="0" bIns="0">
-            <a:spAutoFit/>
-          </a:bodyPr>
-          <a:lstStyle/>
-          <a:p>
-            <a:pPr algn="l"/>
-            <a:r>
-              <a:rPr sz="975" b="1">
-                <a:solidFill>
-                  <a:srgbClr val="8AA0A4"/>
-                </a:solidFill>
-                <a:latin typeface="Arial"/>
-              </a:rPr>
-              <a:t>WHAT GOES IN</a:t>
-            </a:r>
-          </a:p>
-        </p:txBody>
-      </p:sp>
-      <p:sp>
-        <p:nvSpPr>
-          <p:cNvPr id="9" name="TextBox 8"/>
-          <p:cNvSpPr txBox="1"/>
-          <p:nvPr/>
-        </p:nvSpPr>
-        <p:spPr>
-          <a:xfrm>
-            <a:off x="3794760" y="1847088"/>
-            <a:ext cx="2468880" cy="210312"/>
-          </a:xfrm>
-          <a:prstGeom prst="rect">
-            <a:avLst/>
-          </a:prstGeom>
-          <a:noFill/>
-        </p:spPr>
-        <p:txBody>
-          <a:bodyPr wrap="square" lIns="0" rIns="0" tIns="0" bIns="0">
-            <a:spAutoFit/>
-          </a:bodyPr>
-          <a:lstStyle/>
-          <a:p>
-            <a:pPr algn="l"/>
-            <a:r>
-              <a:rPr sz="975" b="1">
-                <a:solidFill>
-                  <a:srgbClr val="8AA0A4"/>
-                </a:solidFill>
-                <a:latin typeface="Arial"/>
-              </a:rPr>
-              <a:t>THE APP</a:t>
-            </a:r>
-          </a:p>
-        </p:txBody>
-      </p:sp>
-      <p:sp>
-        <p:nvSpPr>
-          <p:cNvPr id="10" name="TextBox 9"/>
-          <p:cNvSpPr txBox="1"/>
-          <p:nvPr/>
-        </p:nvSpPr>
-        <p:spPr>
-          <a:xfrm>
-            <a:off x="6903720" y="1847088"/>
-            <a:ext cx="2468880" cy="210312"/>
-          </a:xfrm>
-          <a:prstGeom prst="rect">
-            <a:avLst/>
-          </a:prstGeom>
-          <a:noFill/>
-        </p:spPr>
-        <p:txBody>
-          <a:bodyPr wrap="square" lIns="0" rIns="0" tIns="0" bIns="0">
-            <a:spAutoFit/>
-          </a:bodyPr>
-          <a:lstStyle/>
-          <a:p>
-            <a:pPr algn="l"/>
-            <a:r>
-              <a:rPr sz="975" b="1">
-                <a:solidFill>
-                  <a:srgbClr val="8AA0A4"/>
-                </a:solidFill>
-                <a:latin typeface="Arial"/>
-              </a:rPr>
-              <a:t>WHERE IT IS KEPT</a:t>
-            </a:r>
-          </a:p>
-        </p:txBody>
-      </p:sp>
-      <p:sp>
-        <p:nvSpPr>
-          <p:cNvPr id="11" name="TextBox 10"/>
-          <p:cNvSpPr txBox="1"/>
-          <p:nvPr/>
-        </p:nvSpPr>
-        <p:spPr>
-          <a:xfrm>
-            <a:off x="10012680" y="1847088"/>
-            <a:ext cx="1691640" cy="210312"/>
-          </a:xfrm>
-          <a:prstGeom prst="rect">
-            <a:avLst/>
-          </a:prstGeom>
-          <a:noFill/>
-        </p:spPr>
-        <p:txBody>
-          <a:bodyPr wrap="square" lIns="0" rIns="0" tIns="0" bIns="0">
-            <a:spAutoFit/>
-          </a:bodyPr>
-          <a:lstStyle/>
-          <a:p>
-            <a:pPr algn="l"/>
-            <a:r>
-              <a:rPr sz="975" b="1">
-                <a:solidFill>
-                  <a:srgbClr val="8AA0A4"/>
-                </a:solidFill>
-                <a:latin typeface="Arial"/>
-              </a:rPr>
-              <a:t>AI MODELS</a:t>
-            </a:r>
-          </a:p>
-        </p:txBody>
-      </p:sp>
-      <p:sp>
-        <p:nvSpPr>
-          <p:cNvPr id="12" name="Rounded Rectangle 11"/>
+              <a:t>The arrows are what actually calls what. Only one box is allowed to be the truth.</a:t>
+            </a:r>
+          </a:p>
+        </p:txBody>
+      </p:sp>
+      <p:sp>
+        <p:nvSpPr>
+          <p:cNvPr id="8" name="Rounded Rectangle 7"/>
           <p:cNvSpPr/>
           <p:nvPr/>
         </p:nvSpPr>
         <p:spPr>
           <a:xfrm>
-            <a:off x="685800" y="2148840"/>
-            <a:ext cx="2468880" cy="822960"/>
+            <a:off x="502920" y="1783080"/>
+            <a:ext cx="2331720" cy="2011680"/>
           </a:xfrm>
           <a:prstGeom prst="roundRect">
             <a:avLst>
-              <a:gd name="adj" fmla="val 8000"/>
+              <a:gd name="adj" fmla="val 4000"/>
             </a:avLst>
           </a:prstGeom>
-          <a:solidFill>
-            <a:srgbClr val="111D22"/>
-          </a:solidFill>
-          <a:ln w="14287">
+          <a:noFill/>
+          <a:ln w="12700">
             <a:solidFill>
-              <a:srgbClr val="47C6B7"/>
+              <a:srgbClr val="31444A"/>
             </a:solidFill>
           </a:ln>
+          <a:effectLst/>
         </p:spPr>
         <p:style>
           <a:lnRef idx="1">
@@ -8242,14 +8170,14 @@
       </p:sp>
       <p:sp>
         <p:nvSpPr>
-          <p:cNvPr id="13" name="TextBox 12"/>
+          <p:cNvPr id="9" name="TextBox 8"/>
           <p:cNvSpPr txBox="1"/>
           <p:nvPr/>
         </p:nvSpPr>
         <p:spPr>
           <a:xfrm>
-            <a:off x="777240" y="2212848"/>
-            <a:ext cx="2286000" cy="694944"/>
+            <a:off x="667512" y="1892807"/>
+            <a:ext cx="2002536" cy="201168"/>
           </a:xfrm>
           <a:prstGeom prst="rect">
             <a:avLst/>
@@ -8257,60 +8185,47 @@
           <a:noFill/>
         </p:spPr>
         <p:txBody>
-          <a:bodyPr wrap="square" anchor="ctr" lIns="0" rIns="0" tIns="0" bIns="0">
+          <a:bodyPr wrap="square" lIns="0" rIns="0" tIns="0" bIns="0">
             <a:spAutoFit/>
           </a:bodyPr>
           <a:lstStyle/>
           <a:p>
-            <a:pPr algn="ctr"/>
-            <a:r>
-              <a:rPr sz="1350" b="1">
-                <a:solidFill>
-                  <a:srgbClr val="E8F0EF"/>
-                </a:solidFill>
-                <a:latin typeface="Arial"/>
-              </a:rPr>
-              <a:t>Meetings arrive</a:t>
-            </a:r>
-          </a:p>
-          <a:p>
-            <a:pPr algn="ctr"/>
-            <a:r>
-              <a:rPr sz="1100" b="0">
+            <a:pPr algn="l"/>
+            <a:r>
+              <a:rPr sz="900" b="1">
                 <a:solidFill>
                   <a:srgbClr val="8AA0A4"/>
                 </a:solidFill>
                 <a:latin typeface="Arial"/>
               </a:rPr>
-              <a:t>Teams · YouTube · your own files</a:t>
-            </a:r>
-          </a:p>
-        </p:txBody>
-      </p:sp>
-      <p:sp>
-        <p:nvSpPr>
-          <p:cNvPr id="14" name="Rounded Rectangle 13"/>
+              <a:t>CLIENTS</a:t>
+            </a:r>
+          </a:p>
+        </p:txBody>
+      </p:sp>
+      <p:sp>
+        <p:nvSpPr>
+          <p:cNvPr id="10" name="Rounded Rectangle 9"/>
           <p:cNvSpPr/>
           <p:nvPr/>
         </p:nvSpPr>
         <p:spPr>
           <a:xfrm>
-            <a:off x="685800" y="3227832"/>
-            <a:ext cx="2468880" cy="822960"/>
+            <a:off x="3246120" y="1783080"/>
+            <a:ext cx="2788920" cy="2011680"/>
           </a:xfrm>
           <a:prstGeom prst="roundRect">
             <a:avLst>
-              <a:gd name="adj" fmla="val 8000"/>
+              <a:gd name="adj" fmla="val 4000"/>
             </a:avLst>
           </a:prstGeom>
-          <a:solidFill>
-            <a:srgbClr val="111D22"/>
-          </a:solidFill>
-          <a:ln w="14287">
+          <a:noFill/>
+          <a:ln w="12700">
             <a:solidFill>
-              <a:srgbClr val="8AA0A4"/>
+              <a:srgbClr val="31444A"/>
             </a:solidFill>
           </a:ln>
+          <a:effectLst/>
         </p:spPr>
         <p:style>
           <a:lnRef idx="1">
@@ -8334,14 +8249,14 @@
       </p:sp>
       <p:sp>
         <p:nvSpPr>
-          <p:cNvPr id="15" name="TextBox 14"/>
+          <p:cNvPr id="11" name="TextBox 10"/>
           <p:cNvSpPr txBox="1"/>
           <p:nvPr/>
         </p:nvSpPr>
         <p:spPr>
           <a:xfrm>
-            <a:off x="777240" y="3291839"/>
-            <a:ext cx="2286000" cy="694944"/>
+            <a:off x="3410712" y="1892807"/>
+            <a:ext cx="2459736" cy="201168"/>
           </a:xfrm>
           <a:prstGeom prst="rect">
             <a:avLst/>
@@ -8349,60 +8264,47 @@
           <a:noFill/>
         </p:spPr>
         <p:txBody>
-          <a:bodyPr wrap="square" anchor="ctr" lIns="0" rIns="0" tIns="0" bIns="0">
+          <a:bodyPr wrap="square" lIns="0" rIns="0" tIns="0" bIns="0">
             <a:spAutoFit/>
           </a:bodyPr>
           <a:lstStyle/>
           <a:p>
-            <a:pPr algn="ctr"/>
-            <a:r>
-              <a:rPr sz="1350" b="1">
-                <a:solidFill>
-                  <a:srgbClr val="E8F0EF"/>
-                </a:solidFill>
-                <a:latin typeface="Arial"/>
-              </a:rPr>
-              <a:t>Recording + transcript</a:t>
-            </a:r>
-          </a:p>
-          <a:p>
-            <a:pPr algn="ctr"/>
-            <a:r>
-              <a:rPr sz="1100" b="0">
+            <a:pPr algn="l"/>
+            <a:r>
+              <a:rPr sz="900" b="1">
                 <a:solidFill>
                   <a:srgbClr val="8AA0A4"/>
                 </a:solidFill>
                 <a:latin typeface="Arial"/>
               </a:rPr>
-              <a:t>stored once, never edited</a:t>
-            </a:r>
-          </a:p>
-        </p:txBody>
-      </p:sp>
-      <p:sp>
-        <p:nvSpPr>
-          <p:cNvPr id="16" name="Rounded Rectangle 15"/>
+              <a:t>SERVICES · macOS host</a:t>
+            </a:r>
+          </a:p>
+        </p:txBody>
+      </p:sp>
+      <p:sp>
+        <p:nvSpPr>
+          <p:cNvPr id="12" name="Rounded Rectangle 11"/>
           <p:cNvSpPr/>
           <p:nvPr/>
         </p:nvSpPr>
         <p:spPr>
           <a:xfrm>
-            <a:off x="3794760" y="2148840"/>
-            <a:ext cx="2468880" cy="822960"/>
+            <a:off x="6446520" y="1783080"/>
+            <a:ext cx="5257800" cy="2011680"/>
           </a:xfrm>
           <a:prstGeom prst="roundRect">
             <a:avLst>
-              <a:gd name="adj" fmla="val 8000"/>
+              <a:gd name="adj" fmla="val 4000"/>
             </a:avLst>
           </a:prstGeom>
-          <a:solidFill>
-            <a:srgbClr val="111D22"/>
-          </a:solidFill>
-          <a:ln w="14287">
+          <a:noFill/>
+          <a:ln w="12700">
             <a:solidFill>
-              <a:srgbClr val="47C6B7"/>
+              <a:srgbClr val="31444A"/>
             </a:solidFill>
           </a:ln>
+          <a:effectLst/>
         </p:spPr>
         <p:style>
           <a:lnRef idx="1">
@@ -8426,14 +8328,14 @@
       </p:sp>
       <p:sp>
         <p:nvSpPr>
-          <p:cNvPr id="17" name="TextBox 16"/>
+          <p:cNvPr id="13" name="TextBox 12"/>
           <p:cNvSpPr txBox="1"/>
           <p:nvPr/>
         </p:nvSpPr>
         <p:spPr>
           <a:xfrm>
-            <a:off x="3886200" y="2212848"/>
-            <a:ext cx="2286000" cy="694944"/>
+            <a:off x="6611112" y="1892807"/>
+            <a:ext cx="4928616" cy="201168"/>
           </a:xfrm>
           <a:prstGeom prst="rect">
             <a:avLst/>
@@ -8441,60 +8343,47 @@
           <a:noFill/>
         </p:spPr>
         <p:txBody>
-          <a:bodyPr wrap="square" anchor="ctr" lIns="0" rIns="0" tIns="0" bIns="0">
+          <a:bodyPr wrap="square" lIns="0" rIns="0" tIns="0" bIns="0">
             <a:spAutoFit/>
           </a:bodyPr>
           <a:lstStyle/>
           <a:p>
-            <a:pPr algn="ctr"/>
-            <a:r>
-              <a:rPr sz="1350" b="1">
-                <a:solidFill>
-                  <a:srgbClr val="E8F0EF"/>
-                </a:solidFill>
-                <a:latin typeface="Arial"/>
-              </a:rPr>
-              <a:t>Web app</a:t>
-            </a:r>
-          </a:p>
-          <a:p>
-            <a:pPr algn="ctr"/>
-            <a:r>
-              <a:rPr sz="1100" b="0">
+            <a:pPr algn="l"/>
+            <a:r>
+              <a:rPr sz="900" b="1">
                 <a:solidFill>
                   <a:srgbClr val="8AA0A4"/>
                 </a:solidFill>
                 <a:latin typeface="Arial"/>
               </a:rPr>
-              <a:t>what you click</a:t>
-            </a:r>
-          </a:p>
-        </p:txBody>
-      </p:sp>
-      <p:sp>
-        <p:nvSpPr>
-          <p:cNvPr id="18" name="Rounded Rectangle 17"/>
+              <a:t>DATA STORES · Docker</a:t>
+            </a:r>
+          </a:p>
+        </p:txBody>
+      </p:sp>
+      <p:sp>
+        <p:nvSpPr>
+          <p:cNvPr id="14" name="Rounded Rectangle 13"/>
           <p:cNvSpPr/>
           <p:nvPr/>
         </p:nvSpPr>
         <p:spPr>
           <a:xfrm>
-            <a:off x="3794760" y="3227832"/>
-            <a:ext cx="2468880" cy="822960"/>
+            <a:off x="502920" y="4160520"/>
+            <a:ext cx="5532120" cy="1188720"/>
           </a:xfrm>
           <a:prstGeom prst="roundRect">
             <a:avLst>
-              <a:gd name="adj" fmla="val 8000"/>
+              <a:gd name="adj" fmla="val 4000"/>
             </a:avLst>
           </a:prstGeom>
-          <a:solidFill>
-            <a:srgbClr val="111D22"/>
-          </a:solidFill>
-          <a:ln w="14287">
+          <a:noFill/>
+          <a:ln w="12700">
             <a:solidFill>
-              <a:srgbClr val="47C6B7"/>
+              <a:srgbClr val="31444A"/>
             </a:solidFill>
           </a:ln>
+          <a:effectLst/>
         </p:spPr>
         <p:style>
           <a:lnRef idx="1">
@@ -8518,14 +8407,14 @@
       </p:sp>
       <p:sp>
         <p:nvSpPr>
-          <p:cNvPr id="19" name="TextBox 18"/>
+          <p:cNvPr id="15" name="TextBox 14"/>
           <p:cNvSpPr txBox="1"/>
           <p:nvPr/>
         </p:nvSpPr>
         <p:spPr>
           <a:xfrm>
-            <a:off x="3886200" y="3291839"/>
-            <a:ext cx="2286000" cy="694944"/>
+            <a:off x="667512" y="4270248"/>
+            <a:ext cx="5202936" cy="201168"/>
           </a:xfrm>
           <a:prstGeom prst="rect">
             <a:avLst/>
@@ -8533,60 +8422,47 @@
           <a:noFill/>
         </p:spPr>
         <p:txBody>
-          <a:bodyPr wrap="square" anchor="ctr" lIns="0" rIns="0" tIns="0" bIns="0">
+          <a:bodyPr wrap="square" lIns="0" rIns="0" tIns="0" bIns="0">
             <a:spAutoFit/>
           </a:bodyPr>
           <a:lstStyle/>
           <a:p>
-            <a:pPr algn="ctr"/>
-            <a:r>
-              <a:rPr sz="1350" b="1">
-                <a:solidFill>
-                  <a:srgbClr val="E8F0EF"/>
-                </a:solidFill>
-                <a:latin typeface="Arial"/>
-              </a:rPr>
-              <a:t>API</a:t>
-            </a:r>
-          </a:p>
-          <a:p>
-            <a:pPr algn="ctr"/>
-            <a:r>
-              <a:rPr sz="1100" b="0">
+            <a:pPr algn="l"/>
+            <a:r>
+              <a:rPr sz="900" b="1">
                 <a:solidFill>
                   <a:srgbClr val="8AA0A4"/>
                 </a:solidFill>
                 <a:latin typeface="Arial"/>
               </a:rPr>
-              <a:t>takes your question, returns the answer</a:t>
-            </a:r>
-          </a:p>
-        </p:txBody>
-      </p:sp>
-      <p:sp>
-        <p:nvSpPr>
-          <p:cNvPr id="20" name="Rounded Rectangle 19"/>
+              <a:t>FILESYSTEM</a:t>
+            </a:r>
+          </a:p>
+        </p:txBody>
+      </p:sp>
+      <p:sp>
+        <p:nvSpPr>
+          <p:cNvPr id="16" name="Rounded Rectangle 15"/>
           <p:cNvSpPr/>
           <p:nvPr/>
         </p:nvSpPr>
         <p:spPr>
           <a:xfrm>
-            <a:off x="3794760" y="4306824"/>
-            <a:ext cx="2468880" cy="822960"/>
+            <a:off x="6446520" y="4160520"/>
+            <a:ext cx="5257800" cy="1188720"/>
           </a:xfrm>
           <a:prstGeom prst="roundRect">
             <a:avLst>
-              <a:gd name="adj" fmla="val 8000"/>
+              <a:gd name="adj" fmla="val 4000"/>
             </a:avLst>
           </a:prstGeom>
-          <a:solidFill>
-            <a:srgbClr val="111D22"/>
-          </a:solidFill>
-          <a:ln w="14287">
+          <a:noFill/>
+          <a:ln w="12700">
             <a:solidFill>
-              <a:srgbClr val="47C6B7"/>
+              <a:srgbClr val="31444A"/>
             </a:solidFill>
           </a:ln>
+          <a:effectLst/>
         </p:spPr>
         <p:style>
           <a:lnRef idx="1">
@@ -8610,14 +8486,14 @@
       </p:sp>
       <p:sp>
         <p:nvSpPr>
-          <p:cNvPr id="21" name="TextBox 20"/>
+          <p:cNvPr id="17" name="TextBox 16"/>
           <p:cNvSpPr txBox="1"/>
           <p:nvPr/>
         </p:nvSpPr>
         <p:spPr>
           <a:xfrm>
-            <a:off x="3886200" y="4370832"/>
-            <a:ext cx="2286000" cy="694944"/>
+            <a:off x="6611112" y="4270248"/>
+            <a:ext cx="4928616" cy="201168"/>
           </a:xfrm>
           <a:prstGeom prst="rect">
             <a:avLst/>
@@ -8625,60 +8501,49 @@
           <a:noFill/>
         </p:spPr>
         <p:txBody>
-          <a:bodyPr wrap="square" anchor="ctr" lIns="0" rIns="0" tIns="0" bIns="0">
+          <a:bodyPr wrap="square" lIns="0" rIns="0" tIns="0" bIns="0">
             <a:spAutoFit/>
           </a:bodyPr>
           <a:lstStyle/>
           <a:p>
-            <a:pPr algn="ctr"/>
-            <a:r>
-              <a:rPr sz="1350" b="1">
-                <a:solidFill>
-                  <a:srgbClr val="E8F0EF"/>
-                </a:solidFill>
-                <a:latin typeface="Arial"/>
-              </a:rPr>
-              <a:t>Worker</a:t>
-            </a:r>
-          </a:p>
-          <a:p>
-            <a:pPr algn="ctr"/>
-            <a:r>
-              <a:rPr sz="1100" b="0">
+            <a:pPr algn="l"/>
+            <a:r>
+              <a:rPr sz="900" b="1">
                 <a:solidFill>
                   <a:srgbClr val="8AA0A4"/>
                 </a:solidFill>
                 <a:latin typeface="Arial"/>
               </a:rPr>
-              <a:t>the slow jobs — a crash picks up where it stopped</a:t>
-            </a:r>
-          </a:p>
-        </p:txBody>
-      </p:sp>
-      <p:sp>
-        <p:nvSpPr>
-          <p:cNvPr id="22" name="Rounded Rectangle 21"/>
+              <a:t>AI MODELS · swappable, one attachment point</a:t>
+            </a:r>
+          </a:p>
+        </p:txBody>
+      </p:sp>
+      <p:sp>
+        <p:nvSpPr>
+          <p:cNvPr id="18" name="Rounded Rectangle 17"/>
           <p:cNvSpPr/>
           <p:nvPr/>
         </p:nvSpPr>
         <p:spPr>
           <a:xfrm>
-            <a:off x="6903720" y="2148840"/>
-            <a:ext cx="2468880" cy="822960"/>
+            <a:off x="658368" y="2240280"/>
+            <a:ext cx="2020824" cy="603504"/>
           </a:xfrm>
           <a:prstGeom prst="roundRect">
             <a:avLst>
-              <a:gd name="adj" fmla="val 8000"/>
+              <a:gd name="adj" fmla="val 12000"/>
             </a:avLst>
           </a:prstGeom>
           <a:solidFill>
-            <a:srgbClr val="152624"/>
+            <a:srgbClr val="111D22"/>
           </a:solidFill>
-          <a:ln w="14287">
+          <a:ln w="15875">
             <a:solidFill>
               <a:srgbClr val="47C6B7"/>
             </a:solidFill>
           </a:ln>
+          <a:effectLst/>
         </p:spPr>
         <p:style>
           <a:lnRef idx="1">
@@ -8702,14 +8567,14 @@
       </p:sp>
       <p:sp>
         <p:nvSpPr>
-          <p:cNvPr id="23" name="TextBox 22"/>
+          <p:cNvPr id="19" name="TextBox 18"/>
           <p:cNvSpPr txBox="1"/>
           <p:nvPr/>
         </p:nvSpPr>
         <p:spPr>
           <a:xfrm>
-            <a:off x="6995159" y="2212848"/>
-            <a:ext cx="2286000" cy="694944"/>
+            <a:off x="731519" y="2276856"/>
+            <a:ext cx="1874519" cy="530352"/>
           </a:xfrm>
           <a:prstGeom prst="rect">
             <a:avLst/>
@@ -8724,53 +8589,54 @@
           <a:p>
             <a:pPr algn="ctr"/>
             <a:r>
-              <a:rPr sz="1350" b="1">
-                <a:solidFill>
-                  <a:srgbClr val="E8F0EF"/>
-                </a:solidFill>
-                <a:latin typeface="Arial"/>
-              </a:rPr>
-              <a:t>Postgres</a:t>
+              <a:rPr sz="1200" b="1">
+                <a:solidFill>
+                  <a:srgbClr val="E8F0EF"/>
+                </a:solidFill>
+                <a:latin typeface="Arial"/>
+              </a:rPr>
+              <a:t>web</a:t>
             </a:r>
           </a:p>
           <a:p>
             <a:pPr algn="ctr"/>
             <a:r>
-              <a:rPr sz="1100" b="0">
+              <a:rPr sz="900" b="0">
                 <a:solidFill>
                   <a:srgbClr val="8AA0A4"/>
                 </a:solidFill>
                 <a:latin typeface="Arial"/>
               </a:rPr>
-              <a:t>the record of truth</a:t>
-            </a:r>
-          </a:p>
-        </p:txBody>
-      </p:sp>
-      <p:sp>
-        <p:nvSpPr>
-          <p:cNvPr id="24" name="Rounded Rectangle 23"/>
+              <a:t>React app in the browser</a:t>
+            </a:r>
+          </a:p>
+        </p:txBody>
+      </p:sp>
+      <p:sp>
+        <p:nvSpPr>
+          <p:cNvPr id="20" name="Rounded Rectangle 19"/>
           <p:cNvSpPr/>
           <p:nvPr/>
         </p:nvSpPr>
         <p:spPr>
           <a:xfrm>
-            <a:off x="6903720" y="3227832"/>
-            <a:ext cx="2468880" cy="822960"/>
+            <a:off x="658368" y="2999232"/>
+            <a:ext cx="2020824" cy="603504"/>
           </a:xfrm>
           <a:prstGeom prst="roundRect">
             <a:avLst>
-              <a:gd name="adj" fmla="val 8000"/>
+              <a:gd name="adj" fmla="val 12000"/>
             </a:avLst>
           </a:prstGeom>
           <a:solidFill>
             <a:srgbClr val="111D22"/>
           </a:solidFill>
-          <a:ln w="14287">
+          <a:ln w="15875">
             <a:solidFill>
-              <a:srgbClr val="3B82A6"/>
+              <a:srgbClr val="47C6B7"/>
             </a:solidFill>
           </a:ln>
+          <a:effectLst/>
         </p:spPr>
         <p:style>
           <a:lnRef idx="1">
@@ -8794,14 +8660,14 @@
       </p:sp>
       <p:sp>
         <p:nvSpPr>
-          <p:cNvPr id="25" name="TextBox 24"/>
+          <p:cNvPr id="21" name="TextBox 20"/>
           <p:cNvSpPr txBox="1"/>
           <p:nvPr/>
         </p:nvSpPr>
         <p:spPr>
           <a:xfrm>
-            <a:off x="6995159" y="3291839"/>
-            <a:ext cx="2286000" cy="694944"/>
+            <a:off x="731519" y="3035808"/>
+            <a:ext cx="1874519" cy="530352"/>
           </a:xfrm>
           <a:prstGeom prst="rect">
             <a:avLst/>
@@ -8816,53 +8682,54 @@
           <a:p>
             <a:pPr algn="ctr"/>
             <a:r>
-              <a:rPr sz="1350" b="1">
-                <a:solidFill>
-                  <a:srgbClr val="E8F0EF"/>
-                </a:solidFill>
-                <a:latin typeface="Arial"/>
-              </a:rPr>
-              <a:t>Graph copy</a:t>
+              <a:rPr sz="1200" b="1">
+                <a:solidFill>
+                  <a:srgbClr val="E8F0EF"/>
+                </a:solidFill>
+                <a:latin typeface="Arial"/>
+              </a:rPr>
+              <a:t>puller</a:t>
             </a:r>
           </a:p>
           <a:p>
             <a:pPr algn="ctr"/>
             <a:r>
-              <a:rPr sz="1100" b="0">
+              <a:rPr sz="900" b="0">
                 <a:solidFill>
                   <a:srgbClr val="8AA0A4"/>
                 </a:solidFill>
                 <a:latin typeface="Arial"/>
               </a:rPr>
-              <a:t>how meetings and topics connect</a:t>
-            </a:r>
-          </a:p>
-        </p:txBody>
-      </p:sp>
-      <p:sp>
-        <p:nvSpPr>
-          <p:cNvPr id="26" name="Rounded Rectangle 25"/>
+              <a:t>Teams · YouTube · local files</a:t>
+            </a:r>
+          </a:p>
+        </p:txBody>
+      </p:sp>
+      <p:sp>
+        <p:nvSpPr>
+          <p:cNvPr id="22" name="Rounded Rectangle 21"/>
           <p:cNvSpPr/>
           <p:nvPr/>
         </p:nvSpPr>
         <p:spPr>
           <a:xfrm>
-            <a:off x="6903720" y="4306824"/>
-            <a:ext cx="2468880" cy="822960"/>
+            <a:off x="3401568" y="2240280"/>
+            <a:ext cx="2478024" cy="603504"/>
           </a:xfrm>
           <a:prstGeom prst="roundRect">
             <a:avLst>
-              <a:gd name="adj" fmla="val 8000"/>
+              <a:gd name="adj" fmla="val 12000"/>
             </a:avLst>
           </a:prstGeom>
           <a:solidFill>
             <a:srgbClr val="111D22"/>
           </a:solidFill>
-          <a:ln w="14287">
+          <a:ln w="15875">
             <a:solidFill>
-              <a:srgbClr val="A88BFF"/>
+              <a:srgbClr val="47C6B7"/>
             </a:solidFill>
           </a:ln>
+          <a:effectLst/>
         </p:spPr>
         <p:style>
           <a:lnRef idx="1">
@@ -8886,14 +8753,14 @@
       </p:sp>
       <p:sp>
         <p:nvSpPr>
-          <p:cNvPr id="27" name="TextBox 26"/>
+          <p:cNvPr id="23" name="TextBox 22"/>
           <p:cNvSpPr txBox="1"/>
           <p:nvPr/>
         </p:nvSpPr>
         <p:spPr>
           <a:xfrm>
-            <a:off x="6995159" y="4370832"/>
-            <a:ext cx="2286000" cy="694944"/>
+            <a:off x="3474720" y="2276856"/>
+            <a:ext cx="2331720" cy="530352"/>
           </a:xfrm>
           <a:prstGeom prst="rect">
             <a:avLst/>
@@ -8908,53 +8775,54 @@
           <a:p>
             <a:pPr algn="ctr"/>
             <a:r>
-              <a:rPr sz="1350" b="1">
-                <a:solidFill>
-                  <a:srgbClr val="E8F0EF"/>
-                </a:solidFill>
-                <a:latin typeface="Arial"/>
-              </a:rPr>
-              <a:t>Search copy</a:t>
+              <a:rPr sz="1200" b="1">
+                <a:solidFill>
+                  <a:srgbClr val="E8F0EF"/>
+                </a:solidFill>
+                <a:latin typeface="Arial"/>
+              </a:rPr>
+              <a:t>api</a:t>
             </a:r>
           </a:p>
           <a:p>
             <a:pPr algn="ctr"/>
             <a:r>
-              <a:rPr sz="1100" b="0">
+              <a:rPr sz="900" b="0">
                 <a:solidFill>
                   <a:srgbClr val="8AA0A4"/>
                 </a:solidFill>
                 <a:latin typeface="Arial"/>
               </a:rPr>
-              <a:t>find by words, or by meaning</a:t>
-            </a:r>
-          </a:p>
-        </p:txBody>
-      </p:sp>
-      <p:sp>
-        <p:nvSpPr>
-          <p:cNvPr id="28" name="Rounded Rectangle 27"/>
+              <a:t>FastAPI — questions, intake, live updates</a:t>
+            </a:r>
+          </a:p>
+        </p:txBody>
+      </p:sp>
+      <p:sp>
+        <p:nvSpPr>
+          <p:cNvPr id="24" name="Rounded Rectangle 23"/>
           <p:cNvSpPr/>
           <p:nvPr/>
         </p:nvSpPr>
         <p:spPr>
           <a:xfrm>
-            <a:off x="10012680" y="2148840"/>
-            <a:ext cx="1691640" cy="2066543"/>
+            <a:off x="3401568" y="2999232"/>
+            <a:ext cx="2478024" cy="603504"/>
           </a:xfrm>
           <a:prstGeom prst="roundRect">
             <a:avLst>
-              <a:gd name="adj" fmla="val 8000"/>
+              <a:gd name="adj" fmla="val 12000"/>
             </a:avLst>
           </a:prstGeom>
           <a:solidFill>
             <a:srgbClr val="111D22"/>
           </a:solidFill>
-          <a:ln w="14287">
+          <a:ln w="15875">
             <a:solidFill>
-              <a:srgbClr val="A88BFF"/>
+              <a:srgbClr val="47C6B7"/>
             </a:solidFill>
           </a:ln>
+          <a:effectLst/>
         </p:spPr>
         <p:style>
           <a:lnRef idx="1">
@@ -8978,14 +8846,14 @@
       </p:sp>
       <p:sp>
         <p:nvSpPr>
-          <p:cNvPr id="29" name="TextBox 28"/>
+          <p:cNvPr id="25" name="TextBox 24"/>
           <p:cNvSpPr txBox="1"/>
           <p:nvPr/>
         </p:nvSpPr>
         <p:spPr>
           <a:xfrm>
-            <a:off x="10104119" y="2212848"/>
-            <a:ext cx="1508760" cy="1938527"/>
+            <a:off x="3474720" y="3035808"/>
+            <a:ext cx="2331720" cy="530352"/>
           </a:xfrm>
           <a:prstGeom prst="rect">
             <a:avLst/>
@@ -9000,61 +8868,54 @@
           <a:p>
             <a:pPr algn="ctr"/>
             <a:r>
-              <a:rPr sz="1350" b="1">
-                <a:solidFill>
-                  <a:srgbClr val="E8F0EF"/>
-                </a:solidFill>
-                <a:latin typeface="Arial"/>
-              </a:rPr>
-              <a:t>AI models</a:t>
+              <a:rPr sz="1200" b="1">
+                <a:solidFill>
+                  <a:srgbClr val="E8F0EF"/>
+                </a:solidFill>
+                <a:latin typeface="Arial"/>
+              </a:rPr>
+              <a:t>worker</a:t>
             </a:r>
           </a:p>
           <a:p>
             <a:pPr algn="ctr"/>
             <a:r>
-              <a:rPr sz="1100" b="0">
+              <a:rPr sz="900" b="0">
                 <a:solidFill>
                   <a:srgbClr val="8AA0A4"/>
                 </a:solidFill>
                 <a:latin typeface="Arial"/>
               </a:rPr>
-              <a:t>on this Mac, a GPU box, or the cloud</a:t>
-            </a:r>
-          </a:p>
-          <a:p>
-            <a:pPr algn="ctr"/>
-            <a:r>
-              <a:rPr sz="1100" b="0">
-                <a:solidFill>
-                  <a:srgbClr val="8AA0A4"/>
-                </a:solidFill>
-                <a:latin typeface="Arial"/>
-              </a:rPr>
-              <a:t>swap one — nothing else changes</a:t>
-            </a:r>
-          </a:p>
-        </p:txBody>
-      </p:sp>
-      <p:sp>
-        <p:nvSpPr>
-          <p:cNvPr id="30" name="Right Arrow 29"/>
+              <a:t>ingest steps that resume after a crash</a:t>
+            </a:r>
+          </a:p>
+        </p:txBody>
+      </p:sp>
+      <p:sp>
+        <p:nvSpPr>
+          <p:cNvPr id="26" name="Rounded Rectangle 25"/>
           <p:cNvSpPr/>
           <p:nvPr/>
         </p:nvSpPr>
         <p:spPr>
           <a:xfrm>
-            <a:off x="3268980" y="3552444"/>
-            <a:ext cx="411480" cy="173736"/>
-          </a:xfrm>
-          <a:prstGeom prst="rightArrow">
-            <a:avLst/>
+            <a:off x="6629400" y="2139696"/>
+            <a:ext cx="4892040" cy="512064"/>
+          </a:xfrm>
+          <a:prstGeom prst="roundRect">
+            <a:avLst>
+              <a:gd name="adj" fmla="val 12000"/>
+            </a:avLst>
           </a:prstGeom>
           <a:solidFill>
-            <a:srgbClr val="8AA0A4"/>
+            <a:srgbClr val="152624"/>
           </a:solidFill>
-          <a:ln>
-            <a:noFill/>
-          </a:ln>
+          <a:ln w="15875">
+            <a:solidFill>
+              <a:srgbClr val="47C6B7"/>
+            </a:solidFill>
+          </a:ln>
+          <a:effectLst/>
         </p:spPr>
         <p:style>
           <a:lnRef idx="1">
@@ -9078,24 +8939,64 @@
       </p:sp>
       <p:sp>
         <p:nvSpPr>
-          <p:cNvPr id="31" name="Right Arrow 30"/>
+          <p:cNvPr id="27" name="TextBox 26"/>
+          <p:cNvSpPr txBox="1"/>
+          <p:nvPr/>
+        </p:nvSpPr>
+        <p:spPr>
+          <a:xfrm>
+            <a:off x="6702552" y="2176272"/>
+            <a:ext cx="4745736" cy="438912"/>
+          </a:xfrm>
+          <a:prstGeom prst="rect">
+            <a:avLst/>
+          </a:prstGeom>
+          <a:noFill/>
+        </p:spPr>
+        <p:txBody>
+          <a:bodyPr wrap="square" anchor="ctr" lIns="0" rIns="0" tIns="0" bIns="0">
+            <a:spAutoFit/>
+          </a:bodyPr>
+          <a:lstStyle/>
+          <a:p>
+            <a:pPr algn="ctr"/>
+            <a:r>
+              <a:rPr sz="1200" b="1">
+                <a:solidFill>
+                  <a:srgbClr val="E8F0EF"/>
+                </a:solidFill>
+                <a:latin typeface="Arial"/>
+              </a:rPr>
+              <a:t>Postgres — the record of truth</a:t>
+            </a:r>
+          </a:p>
+        </p:txBody>
+      </p:sp>
+      <p:sp>
+        <p:nvSpPr>
+          <p:cNvPr id="28" name="Rounded Rectangle 27"/>
           <p:cNvSpPr/>
           <p:nvPr/>
         </p:nvSpPr>
         <p:spPr>
           <a:xfrm>
-            <a:off x="6377940" y="3552444"/>
-            <a:ext cx="411480" cy="173736"/>
-          </a:xfrm>
-          <a:prstGeom prst="rightArrow">
-            <a:avLst/>
+            <a:off x="6629400" y="2724912"/>
+            <a:ext cx="4892040" cy="475488"/>
+          </a:xfrm>
+          <a:prstGeom prst="roundRect">
+            <a:avLst>
+              <a:gd name="adj" fmla="val 12000"/>
+            </a:avLst>
           </a:prstGeom>
           <a:solidFill>
-            <a:srgbClr val="8AA0A4"/>
+            <a:srgbClr val="111D22"/>
           </a:solidFill>
-          <a:ln>
-            <a:noFill/>
-          </a:ln>
+          <a:ln w="15875">
+            <a:solidFill>
+              <a:srgbClr val="3B82A6"/>
+            </a:solidFill>
+          </a:ln>
+          <a:effectLst/>
         </p:spPr>
         <p:style>
           <a:lnRef idx="1">
@@ -9119,24 +9020,64 @@
       </p:sp>
       <p:sp>
         <p:nvSpPr>
-          <p:cNvPr id="32" name="Right Arrow 31"/>
+          <p:cNvPr id="29" name="TextBox 28"/>
+          <p:cNvSpPr txBox="1"/>
+          <p:nvPr/>
+        </p:nvSpPr>
+        <p:spPr>
+          <a:xfrm>
+            <a:off x="6702552" y="2761488"/>
+            <a:ext cx="4745736" cy="402336"/>
+          </a:xfrm>
+          <a:prstGeom prst="rect">
+            <a:avLst/>
+          </a:prstGeom>
+          <a:noFill/>
+        </p:spPr>
+        <p:txBody>
+          <a:bodyPr wrap="square" anchor="ctr" lIns="0" rIns="0" tIns="0" bIns="0">
+            <a:spAutoFit/>
+          </a:bodyPr>
+          <a:lstStyle/>
+          <a:p>
+            <a:pPr algn="ctr"/>
+            <a:r>
+              <a:rPr sz="1200" b="1">
+                <a:solidFill>
+                  <a:srgbClr val="E8F0EF"/>
+                </a:solidFill>
+                <a:latin typeface="Arial"/>
+              </a:rPr>
+              <a:t>Neo4j — graph copy: how meetings and topics connect</a:t>
+            </a:r>
+          </a:p>
+        </p:txBody>
+      </p:sp>
+      <p:sp>
+        <p:nvSpPr>
+          <p:cNvPr id="30" name="Rounded Rectangle 29"/>
           <p:cNvSpPr/>
           <p:nvPr/>
         </p:nvSpPr>
         <p:spPr>
           <a:xfrm>
-            <a:off x="9486900" y="3552444"/>
-            <a:ext cx="411480" cy="173736"/>
-          </a:xfrm>
-          <a:prstGeom prst="rightArrow">
-            <a:avLst/>
+            <a:off x="6629400" y="3273552"/>
+            <a:ext cx="4892040" cy="475488"/>
+          </a:xfrm>
+          <a:prstGeom prst="roundRect">
+            <a:avLst>
+              <a:gd name="adj" fmla="val 12000"/>
+            </a:avLst>
           </a:prstGeom>
           <a:solidFill>
-            <a:srgbClr val="8AA0A4"/>
+            <a:srgbClr val="111D22"/>
           </a:solidFill>
-          <a:ln>
-            <a:noFill/>
-          </a:ln>
+          <a:ln w="15875">
+            <a:solidFill>
+              <a:srgbClr val="A88BFF"/>
+            </a:solidFill>
+          </a:ln>
+          <a:effectLst/>
         </p:spPr>
         <p:style>
           <a:lnRef idx="1">
@@ -9160,14 +9101,353 @@
       </p:sp>
       <p:sp>
         <p:nvSpPr>
+          <p:cNvPr id="31" name="TextBox 30"/>
+          <p:cNvSpPr txBox="1"/>
+          <p:nvPr/>
+        </p:nvSpPr>
+        <p:spPr>
+          <a:xfrm>
+            <a:off x="6702552" y="3310128"/>
+            <a:ext cx="4745736" cy="402336"/>
+          </a:xfrm>
+          <a:prstGeom prst="rect">
+            <a:avLst/>
+          </a:prstGeom>
+          <a:noFill/>
+        </p:spPr>
+        <p:txBody>
+          <a:bodyPr wrap="square" anchor="ctr" lIns="0" rIns="0" tIns="0" bIns="0">
+            <a:spAutoFit/>
+          </a:bodyPr>
+          <a:lstStyle/>
+          <a:p>
+            <a:pPr algn="ctr"/>
+            <a:r>
+              <a:rPr sz="1200" b="1">
+                <a:solidFill>
+                  <a:srgbClr val="E8F0EF"/>
+                </a:solidFill>
+                <a:latin typeface="Arial"/>
+              </a:rPr>
+              <a:t>Meilisearch — search copy: exact words + meaning</a:t>
+            </a:r>
+          </a:p>
+        </p:txBody>
+      </p:sp>
+      <p:sp>
+        <p:nvSpPr>
+          <p:cNvPr id="32" name="Rounded Rectangle 31"/>
+          <p:cNvSpPr/>
+          <p:nvPr/>
+        </p:nvSpPr>
+        <p:spPr>
+          <a:xfrm>
+            <a:off x="685800" y="4617720"/>
+            <a:ext cx="2331720" cy="566928"/>
+          </a:xfrm>
+          <a:prstGeom prst="roundRect">
+            <a:avLst>
+              <a:gd name="adj" fmla="val 12000"/>
+            </a:avLst>
+          </a:prstGeom>
+          <a:solidFill>
+            <a:srgbClr val="111D22"/>
+          </a:solidFill>
+          <a:ln w="15875">
+            <a:solidFill>
+              <a:srgbClr val="8AA0A4"/>
+            </a:solidFill>
+          </a:ln>
+          <a:effectLst/>
+        </p:spPr>
+        <p:style>
+          <a:lnRef idx="1">
+            <a:schemeClr val="accent1"/>
+          </a:lnRef>
+          <a:fillRef idx="3">
+            <a:schemeClr val="accent1"/>
+          </a:fillRef>
+          <a:effectRef idx="2">
+            <a:schemeClr val="accent1"/>
+          </a:effectRef>
+          <a:fontRef idx="minor">
+            <a:schemeClr val="lt1"/>
+          </a:fontRef>
+        </p:style>
+        <p:txBody>
+          <a:bodyPr rtlCol="0" anchor="ctr"/>
+          <a:lstStyle/>
+          <a:p/>
+        </p:txBody>
+      </p:sp>
+      <p:sp>
+        <p:nvSpPr>
           <p:cNvPr id="33" name="TextBox 32"/>
           <p:cNvSpPr txBox="1"/>
           <p:nvPr/>
         </p:nvSpPr>
         <p:spPr>
           <a:xfrm>
-            <a:off x="1188720" y="5394960"/>
-            <a:ext cx="9829800" cy="457200"/>
+            <a:off x="758952" y="4654296"/>
+            <a:ext cx="2185415" cy="493776"/>
+          </a:xfrm>
+          <a:prstGeom prst="rect">
+            <a:avLst/>
+          </a:prstGeom>
+          <a:noFill/>
+        </p:spPr>
+        <p:txBody>
+          <a:bodyPr wrap="square" anchor="ctr" lIns="0" rIns="0" tIns="0" bIns="0">
+            <a:spAutoFit/>
+          </a:bodyPr>
+          <a:lstStyle/>
+          <a:p>
+            <a:pPr algn="ctr"/>
+            <a:r>
+              <a:rPr sz="1200" b="1">
+                <a:solidFill>
+                  <a:srgbClr val="E8F0EF"/>
+                </a:solidFill>
+                <a:latin typeface="Arial"/>
+              </a:rPr>
+              <a:t>source drops</a:t>
+            </a:r>
+          </a:p>
+          <a:p>
+            <a:pPr algn="ctr"/>
+            <a:r>
+              <a:rPr sz="900" b="0">
+                <a:solidFill>
+                  <a:srgbClr val="8AA0A4"/>
+                </a:solidFill>
+                <a:latin typeface="Arial"/>
+              </a:rPr>
+              <a:t>originals, written once, never edited</a:t>
+            </a:r>
+          </a:p>
+        </p:txBody>
+      </p:sp>
+      <p:sp>
+        <p:nvSpPr>
+          <p:cNvPr id="34" name="Rounded Rectangle 33"/>
+          <p:cNvSpPr/>
+          <p:nvPr/>
+        </p:nvSpPr>
+        <p:spPr>
+          <a:xfrm>
+            <a:off x="3291840" y="4617720"/>
+            <a:ext cx="2606040" cy="566928"/>
+          </a:xfrm>
+          <a:prstGeom prst="roundRect">
+            <a:avLst>
+              <a:gd name="adj" fmla="val 12000"/>
+            </a:avLst>
+          </a:prstGeom>
+          <a:solidFill>
+            <a:srgbClr val="111D22"/>
+          </a:solidFill>
+          <a:ln w="15875">
+            <a:solidFill>
+              <a:srgbClr val="8AA0A4"/>
+            </a:solidFill>
+          </a:ln>
+          <a:effectLst/>
+        </p:spPr>
+        <p:style>
+          <a:lnRef idx="1">
+            <a:schemeClr val="accent1"/>
+          </a:lnRef>
+          <a:fillRef idx="3">
+            <a:schemeClr val="accent1"/>
+          </a:fillRef>
+          <a:effectRef idx="2">
+            <a:schemeClr val="accent1"/>
+          </a:effectRef>
+          <a:fontRef idx="minor">
+            <a:schemeClr val="lt1"/>
+          </a:fontRef>
+        </p:style>
+        <p:txBody>
+          <a:bodyPr rtlCol="0" anchor="ctr"/>
+          <a:lstStyle/>
+          <a:p/>
+        </p:txBody>
+      </p:sp>
+      <p:sp>
+        <p:nvSpPr>
+          <p:cNvPr id="35" name="TextBox 34"/>
+          <p:cNvSpPr txBox="1"/>
+          <p:nvPr/>
+        </p:nvSpPr>
+        <p:spPr>
+          <a:xfrm>
+            <a:off x="3364992" y="4654296"/>
+            <a:ext cx="2459736" cy="493776"/>
+          </a:xfrm>
+          <a:prstGeom prst="rect">
+            <a:avLst/>
+          </a:prstGeom>
+          <a:noFill/>
+        </p:spPr>
+        <p:txBody>
+          <a:bodyPr wrap="square" anchor="ctr" lIns="0" rIns="0" tIns="0" bIns="0">
+            <a:spAutoFit/>
+          </a:bodyPr>
+          <a:lstStyle/>
+          <a:p>
+            <a:pPr algn="ctr"/>
+            <a:r>
+              <a:rPr sz="1200" b="1">
+                <a:solidFill>
+                  <a:srgbClr val="E8F0EF"/>
+                </a:solidFill>
+                <a:latin typeface="Arial"/>
+              </a:rPr>
+              <a:t>content root</a:t>
+            </a:r>
+          </a:p>
+          <a:p>
+            <a:pPr algn="ctr"/>
+            <a:r>
+              <a:rPr sz="900" b="0">
+                <a:solidFill>
+                  <a:srgbClr val="8AA0A4"/>
+                </a:solidFill>
+                <a:latin typeface="Arial"/>
+              </a:rPr>
+              <a:t>frames · screenshots it generates</a:t>
+            </a:r>
+          </a:p>
+        </p:txBody>
+      </p:sp>
+      <p:sp>
+        <p:nvSpPr>
+          <p:cNvPr id="36" name="Rounded Rectangle 35"/>
+          <p:cNvSpPr/>
+          <p:nvPr/>
+        </p:nvSpPr>
+        <p:spPr>
+          <a:xfrm>
+            <a:off x="6629400" y="4617720"/>
+            <a:ext cx="4892040" cy="566928"/>
+          </a:xfrm>
+          <a:prstGeom prst="roundRect">
+            <a:avLst>
+              <a:gd name="adj" fmla="val 12000"/>
+            </a:avLst>
+          </a:prstGeom>
+          <a:solidFill>
+            <a:srgbClr val="111D22"/>
+          </a:solidFill>
+          <a:ln w="15875">
+            <a:solidFill>
+              <a:srgbClr val="A88BFF"/>
+            </a:solidFill>
+          </a:ln>
+          <a:effectLst/>
+        </p:spPr>
+        <p:style>
+          <a:lnRef idx="1">
+            <a:schemeClr val="accent1"/>
+          </a:lnRef>
+          <a:fillRef idx="3">
+            <a:schemeClr val="accent1"/>
+          </a:fillRef>
+          <a:effectRef idx="2">
+            <a:schemeClr val="accent1"/>
+          </a:effectRef>
+          <a:fontRef idx="minor">
+            <a:schemeClr val="lt1"/>
+          </a:fontRef>
+        </p:style>
+        <p:txBody>
+          <a:bodyPr rtlCol="0" anchor="ctr"/>
+          <a:lstStyle/>
+          <a:p/>
+        </p:txBody>
+      </p:sp>
+      <p:sp>
+        <p:nvSpPr>
+          <p:cNvPr id="37" name="TextBox 36"/>
+          <p:cNvSpPr txBox="1"/>
+          <p:nvPr/>
+        </p:nvSpPr>
+        <p:spPr>
+          <a:xfrm>
+            <a:off x="6702552" y="4654296"/>
+            <a:ext cx="4745736" cy="493776"/>
+          </a:xfrm>
+          <a:prstGeom prst="rect">
+            <a:avLst/>
+          </a:prstGeom>
+          <a:noFill/>
+        </p:spPr>
+        <p:txBody>
+          <a:bodyPr wrap="square" anchor="ctr" lIns="0" rIns="0" tIns="0" bIns="0">
+            <a:spAutoFit/>
+          </a:bodyPr>
+          <a:lstStyle/>
+          <a:p>
+            <a:pPr algn="ctr"/>
+            <a:r>
+              <a:rPr sz="1200" b="1">
+                <a:solidFill>
+                  <a:srgbClr val="E8F0EF"/>
+                </a:solidFill>
+                <a:latin typeface="Arial"/>
+              </a:rPr>
+              <a:t>on this Mac (Apple Vision · MLX)  ·  a GPU box on the LAN  ·  Ollama  ·  OpenAI</a:t>
+            </a:r>
+          </a:p>
+        </p:txBody>
+      </p:sp>
+      <p:cxnSp>
+        <p:nvCxnSpPr>
+          <p:cNvPr id="38" name="Connector 37"/>
+          <p:cNvCxnSpPr/>
+          <p:nvPr/>
+        </p:nvCxnSpPr>
+        <p:spPr>
+          <a:xfrm>
+            <a:off x="2679192" y="2542032"/>
+            <a:ext cx="722376" cy="0"/>
+          </a:xfrm>
+          <a:prstGeom prst="line">
+            <a:avLst/>
+          </a:prstGeom>
+          <a:ln w="15875">
+            <a:solidFill>
+              <a:srgbClr val="8AA0A4"/>
+            </a:solidFill>
+            <a:tailEnd type="triangle" w="sm" len="sm"/>
+          </a:ln>
+          <a:effectLst/>
+        </p:spPr>
+        <p:style>
+          <a:lnRef idx="2">
+            <a:schemeClr val="accent1"/>
+          </a:lnRef>
+          <a:fillRef idx="0">
+            <a:schemeClr val="accent1"/>
+          </a:fillRef>
+          <a:effectRef idx="1">
+            <a:schemeClr val="accent1"/>
+          </a:effectRef>
+          <a:fontRef idx="minor">
+            <a:schemeClr val="tx1"/>
+          </a:fontRef>
+        </p:style>
+      </p:cxnSp>
+      <p:sp>
+        <p:nvSpPr>
+          <p:cNvPr id="39" name="TextBox 38"/>
+          <p:cNvSpPr txBox="1"/>
+          <p:nvPr/>
+        </p:nvSpPr>
+        <p:spPr>
+          <a:xfrm>
+            <a:off x="2724912" y="2331720"/>
+            <a:ext cx="640080" cy="155448"/>
           </a:xfrm>
           <a:prstGeom prst="rect">
             <a:avLst/>
@@ -9182,27 +9462,64 @@
           <a:p>
             <a:pPr algn="ctr"/>
             <a:r>
-              <a:rPr sz="1650" b="1">
-                <a:solidFill>
-                  <a:srgbClr val="47C6B7"/>
-                </a:solidFill>
-                <a:latin typeface="Arial"/>
-              </a:rPr>
-              <a:t>Only Postgres is the truth. Delete the other two and the system rebuilds them.</a:t>
-            </a:r>
-          </a:p>
-        </p:txBody>
-      </p:sp>
-      <p:sp>
-        <p:nvSpPr>
-          <p:cNvPr id="34" name="TextBox 33"/>
+              <a:rPr sz="750" b="0">
+                <a:solidFill>
+                  <a:srgbClr val="778B90"/>
+                </a:solidFill>
+                <a:latin typeface="Arial"/>
+              </a:rPr>
+              <a:t>HTTP + SSE</a:t>
+            </a:r>
+          </a:p>
+        </p:txBody>
+      </p:sp>
+      <p:cxnSp>
+        <p:nvCxnSpPr>
+          <p:cNvPr id="40" name="Connector 39"/>
+          <p:cNvCxnSpPr/>
+          <p:nvPr/>
+        </p:nvCxnSpPr>
+        <p:spPr>
+          <a:xfrm flipV="1">
+            <a:off x="2679192" y="2871216"/>
+            <a:ext cx="722376" cy="429768"/>
+          </a:xfrm>
+          <a:prstGeom prst="line">
+            <a:avLst/>
+          </a:prstGeom>
+          <a:ln w="15875">
+            <a:solidFill>
+              <a:srgbClr val="8AA0A4"/>
+            </a:solidFill>
+            <a:tailEnd type="triangle" w="sm" len="sm"/>
+          </a:ln>
+          <a:effectLst/>
+        </p:spPr>
+        <p:style>
+          <a:lnRef idx="2">
+            <a:schemeClr val="accent1"/>
+          </a:lnRef>
+          <a:fillRef idx="0">
+            <a:schemeClr val="accent1"/>
+          </a:fillRef>
+          <a:effectRef idx="1">
+            <a:schemeClr val="accent1"/>
+          </a:effectRef>
+          <a:fontRef idx="minor">
+            <a:schemeClr val="tx1"/>
+          </a:fontRef>
+        </p:style>
+      </p:cxnSp>
+      <p:sp>
+        <p:nvSpPr>
+          <p:cNvPr id="41" name="TextBox 40"/>
           <p:cNvSpPr txBox="1"/>
           <p:nvPr/>
         </p:nvSpPr>
         <p:spPr>
           <a:xfrm>
-            <a:off x="1188720" y="5815584"/>
-            <a:ext cx="9829800" cy="265176"/>
+            <a:off x="2724912" y="3346704"/>
+            <a:ext cx="640080" cy="155448"/>
           </a:xfrm>
           <a:prstGeom prst="rect">
             <a:avLst/>
@@ -9217,13 +9534,553 @@
           <a:p>
             <a:pPr algn="ctr"/>
             <a:r>
-              <a:rPr sz="1275" b="0">
+              <a:rPr sz="750" b="0">
+                <a:solidFill>
+                  <a:srgbClr val="778B90"/>
+                </a:solidFill>
+                <a:latin typeface="Arial"/>
+              </a:rPr>
+              <a:t>POST /ingests</a:t>
+            </a:r>
+          </a:p>
+        </p:txBody>
+      </p:sp>
+      <p:cxnSp>
+        <p:nvCxnSpPr>
+          <p:cNvPr id="42" name="Connector 41"/>
+          <p:cNvCxnSpPr/>
+          <p:nvPr/>
+        </p:nvCxnSpPr>
+        <p:spPr>
+          <a:xfrm flipV="1">
+            <a:off x="5879592" y="2395728"/>
+            <a:ext cx="749808" cy="91440"/>
+          </a:xfrm>
+          <a:prstGeom prst="line">
+            <a:avLst/>
+          </a:prstGeom>
+          <a:ln w="15875">
+            <a:solidFill>
+              <a:srgbClr val="8AA0A4"/>
+            </a:solidFill>
+            <a:tailEnd type="triangle" w="sm" len="sm"/>
+          </a:ln>
+          <a:effectLst/>
+        </p:spPr>
+        <p:style>
+          <a:lnRef idx="2">
+            <a:schemeClr val="accent1"/>
+          </a:lnRef>
+          <a:fillRef idx="0">
+            <a:schemeClr val="accent1"/>
+          </a:fillRef>
+          <a:effectRef idx="1">
+            <a:schemeClr val="accent1"/>
+          </a:effectRef>
+          <a:fontRef idx="minor">
+            <a:schemeClr val="tx1"/>
+          </a:fontRef>
+        </p:style>
+      </p:cxnSp>
+      <p:sp>
+        <p:nvSpPr>
+          <p:cNvPr id="43" name="TextBox 42"/>
+          <p:cNvSpPr txBox="1"/>
+          <p:nvPr/>
+        </p:nvSpPr>
+        <p:spPr>
+          <a:xfrm>
+            <a:off x="5907024" y="2011680"/>
+            <a:ext cx="694944" cy="155448"/>
+          </a:xfrm>
+          <a:prstGeom prst="rect">
+            <a:avLst/>
+          </a:prstGeom>
+          <a:noFill/>
+        </p:spPr>
+        <p:txBody>
+          <a:bodyPr wrap="square" lIns="0" rIns="0" tIns="0" bIns="0">
+            <a:spAutoFit/>
+          </a:bodyPr>
+          <a:lstStyle/>
+          <a:p>
+            <a:pPr algn="ctr"/>
+            <a:r>
+              <a:rPr sz="750" b="0">
+                <a:solidFill>
+                  <a:srgbClr val="778B90"/>
+                </a:solidFill>
+                <a:latin typeface="Arial"/>
+              </a:rPr>
+              <a:t>reads + writes</a:t>
+            </a:r>
+          </a:p>
+        </p:txBody>
+      </p:sp>
+      <p:cxnSp>
+        <p:nvCxnSpPr>
+          <p:cNvPr id="44" name="Connector 43"/>
+          <p:cNvCxnSpPr/>
+          <p:nvPr/>
+        </p:nvCxnSpPr>
+        <p:spPr>
+          <a:xfrm flipV="1">
+            <a:off x="5879592" y="2962656"/>
+            <a:ext cx="749808" cy="237744"/>
+          </a:xfrm>
+          <a:prstGeom prst="line">
+            <a:avLst/>
+          </a:prstGeom>
+          <a:ln w="15875">
+            <a:solidFill>
+              <a:srgbClr val="8AA0A4"/>
+            </a:solidFill>
+            <a:tailEnd type="triangle" w="sm" len="sm"/>
+          </a:ln>
+          <a:effectLst/>
+        </p:spPr>
+        <p:style>
+          <a:lnRef idx="2">
+            <a:schemeClr val="accent1"/>
+          </a:lnRef>
+          <a:fillRef idx="0">
+            <a:schemeClr val="accent1"/>
+          </a:fillRef>
+          <a:effectRef idx="1">
+            <a:schemeClr val="accent1"/>
+          </a:effectRef>
+          <a:fontRef idx="minor">
+            <a:schemeClr val="tx1"/>
+          </a:fontRef>
+        </p:style>
+      </p:cxnSp>
+      <p:cxnSp>
+        <p:nvCxnSpPr>
+          <p:cNvPr id="45" name="Connector 44"/>
+          <p:cNvCxnSpPr/>
+          <p:nvPr/>
+        </p:nvCxnSpPr>
+        <p:spPr>
+          <a:xfrm>
+            <a:off x="5879592" y="3346704"/>
+            <a:ext cx="749808" cy="164592"/>
+          </a:xfrm>
+          <a:prstGeom prst="line">
+            <a:avLst/>
+          </a:prstGeom>
+          <a:ln w="15875">
+            <a:solidFill>
+              <a:srgbClr val="8AA0A4"/>
+            </a:solidFill>
+            <a:tailEnd type="triangle" w="sm" len="sm"/>
+          </a:ln>
+          <a:effectLst/>
+        </p:spPr>
+        <p:style>
+          <a:lnRef idx="2">
+            <a:schemeClr val="accent1"/>
+          </a:lnRef>
+          <a:fillRef idx="0">
+            <a:schemeClr val="accent1"/>
+          </a:fillRef>
+          <a:effectRef idx="1">
+            <a:schemeClr val="accent1"/>
+          </a:effectRef>
+          <a:fontRef idx="minor">
+            <a:schemeClr val="tx1"/>
+          </a:fontRef>
+        </p:style>
+      </p:cxnSp>
+      <p:sp>
+        <p:nvSpPr>
+          <p:cNvPr id="46" name="TextBox 45"/>
+          <p:cNvSpPr txBox="1"/>
+          <p:nvPr/>
+        </p:nvSpPr>
+        <p:spPr>
+          <a:xfrm>
+            <a:off x="5907024" y="3529584"/>
+            <a:ext cx="694944" cy="155448"/>
+          </a:xfrm>
+          <a:prstGeom prst="rect">
+            <a:avLst/>
+          </a:prstGeom>
+          <a:noFill/>
+        </p:spPr>
+        <p:txBody>
+          <a:bodyPr wrap="square" lIns="0" rIns="0" tIns="0" bIns="0">
+            <a:spAutoFit/>
+          </a:bodyPr>
+          <a:lstStyle/>
+          <a:p>
+            <a:pPr algn="ctr"/>
+            <a:r>
+              <a:rPr sz="750" b="0">
+                <a:solidFill>
+                  <a:srgbClr val="778B90"/>
+                </a:solidFill>
+                <a:latin typeface="Arial"/>
+              </a:rPr>
+              <a:t>projects · one writer</a:t>
+            </a:r>
+          </a:p>
+        </p:txBody>
+      </p:sp>
+      <p:cxnSp>
+        <p:nvCxnSpPr>
+          <p:cNvPr id="47" name="Connector 46"/>
+          <p:cNvCxnSpPr/>
+          <p:nvPr/>
+        </p:nvCxnSpPr>
+        <p:spPr>
+          <a:xfrm>
+            <a:off x="1673352" y="3602736"/>
+            <a:ext cx="0" cy="1014984"/>
+          </a:xfrm>
+          <a:prstGeom prst="line">
+            <a:avLst/>
+          </a:prstGeom>
+          <a:ln w="15875">
+            <a:solidFill>
+              <a:srgbClr val="8AA0A4"/>
+            </a:solidFill>
+            <a:tailEnd type="triangle" w="sm" len="sm"/>
+          </a:ln>
+          <a:effectLst/>
+        </p:spPr>
+        <p:style>
+          <a:lnRef idx="2">
+            <a:schemeClr val="accent1"/>
+          </a:lnRef>
+          <a:fillRef idx="0">
+            <a:schemeClr val="accent1"/>
+          </a:fillRef>
+          <a:effectRef idx="1">
+            <a:schemeClr val="accent1"/>
+          </a:effectRef>
+          <a:fontRef idx="minor">
+            <a:schemeClr val="tx1"/>
+          </a:fontRef>
+        </p:style>
+      </p:cxnSp>
+      <p:sp>
+        <p:nvSpPr>
+          <p:cNvPr id="48" name="TextBox 47"/>
+          <p:cNvSpPr txBox="1"/>
+          <p:nvPr/>
+        </p:nvSpPr>
+        <p:spPr>
+          <a:xfrm>
+            <a:off x="1709928" y="3931920"/>
+            <a:ext cx="1188720" cy="155448"/>
+          </a:xfrm>
+          <a:prstGeom prst="rect">
+            <a:avLst/>
+          </a:prstGeom>
+          <a:noFill/>
+        </p:spPr>
+        <p:txBody>
+          <a:bodyPr wrap="square" lIns="0" rIns="0" tIns="0" bIns="0">
+            <a:spAutoFit/>
+          </a:bodyPr>
+          <a:lstStyle/>
+          <a:p>
+            <a:pPr algn="ctr"/>
+            <a:r>
+              <a:rPr sz="750" b="0">
+                <a:solidFill>
+                  <a:srgbClr val="778B90"/>
+                </a:solidFill>
+                <a:latin typeface="Arial"/>
+              </a:rPr>
+              <a:t>writes originals</a:t>
+            </a:r>
+          </a:p>
+        </p:txBody>
+      </p:sp>
+      <p:cxnSp>
+        <p:nvCxnSpPr>
+          <p:cNvPr id="49" name="Connector 48"/>
+          <p:cNvCxnSpPr/>
+          <p:nvPr/>
+        </p:nvCxnSpPr>
+        <p:spPr>
+          <a:xfrm flipV="1">
+            <a:off x="3017520" y="3602736"/>
+            <a:ext cx="960119" cy="1014984"/>
+          </a:xfrm>
+          <a:prstGeom prst="line">
+            <a:avLst/>
+          </a:prstGeom>
+          <a:ln w="15875">
+            <a:solidFill>
+              <a:srgbClr val="778B90"/>
+            </a:solidFill>
+            <a:tailEnd type="triangle" w="sm" len="sm"/>
+          </a:ln>
+          <a:effectLst/>
+        </p:spPr>
+        <p:style>
+          <a:lnRef idx="2">
+            <a:schemeClr val="accent1"/>
+          </a:lnRef>
+          <a:fillRef idx="0">
+            <a:schemeClr val="accent1"/>
+          </a:fillRef>
+          <a:effectRef idx="1">
+            <a:schemeClr val="accent1"/>
+          </a:effectRef>
+          <a:fontRef idx="minor">
+            <a:schemeClr val="tx1"/>
+          </a:fontRef>
+        </p:style>
+      </p:cxnSp>
+      <p:sp>
+        <p:nvSpPr>
+          <p:cNvPr id="50" name="TextBox 49"/>
+          <p:cNvSpPr txBox="1"/>
+          <p:nvPr/>
+        </p:nvSpPr>
+        <p:spPr>
+          <a:xfrm>
+            <a:off x="3035808" y="3913632"/>
+            <a:ext cx="914400" cy="155448"/>
+          </a:xfrm>
+          <a:prstGeom prst="rect">
+            <a:avLst/>
+          </a:prstGeom>
+          <a:noFill/>
+        </p:spPr>
+        <p:txBody>
+          <a:bodyPr wrap="square" lIns="0" rIns="0" tIns="0" bIns="0">
+            <a:spAutoFit/>
+          </a:bodyPr>
+          <a:lstStyle/>
+          <a:p>
+            <a:pPr algn="ctr"/>
+            <a:r>
+              <a:rPr sz="750" b="0">
+                <a:solidFill>
+                  <a:srgbClr val="778B90"/>
+                </a:solidFill>
+                <a:latin typeface="Arial"/>
+              </a:rPr>
+              <a:t>reads</a:t>
+            </a:r>
+          </a:p>
+        </p:txBody>
+      </p:sp>
+      <p:cxnSp>
+        <p:nvCxnSpPr>
+          <p:cNvPr id="51" name="Connector 50"/>
+          <p:cNvCxnSpPr/>
+          <p:nvPr/>
+        </p:nvCxnSpPr>
+        <p:spPr>
+          <a:xfrm>
+            <a:off x="4663440" y="3602736"/>
+            <a:ext cx="0" cy="1014984"/>
+          </a:xfrm>
+          <a:prstGeom prst="line">
+            <a:avLst/>
+          </a:prstGeom>
+          <a:ln w="15875">
+            <a:solidFill>
+              <a:srgbClr val="8AA0A4"/>
+            </a:solidFill>
+            <a:tailEnd type="triangle" w="sm" len="sm"/>
+          </a:ln>
+          <a:effectLst/>
+        </p:spPr>
+        <p:style>
+          <a:lnRef idx="2">
+            <a:schemeClr val="accent1"/>
+          </a:lnRef>
+          <a:fillRef idx="0">
+            <a:schemeClr val="accent1"/>
+          </a:fillRef>
+          <a:effectRef idx="1">
+            <a:schemeClr val="accent1"/>
+          </a:effectRef>
+          <a:fontRef idx="minor">
+            <a:schemeClr val="tx1"/>
+          </a:fontRef>
+        </p:style>
+      </p:cxnSp>
+      <p:sp>
+        <p:nvSpPr>
+          <p:cNvPr id="52" name="TextBox 51"/>
+          <p:cNvSpPr txBox="1"/>
+          <p:nvPr/>
+        </p:nvSpPr>
+        <p:spPr>
+          <a:xfrm>
+            <a:off x="4700016" y="3931920"/>
+            <a:ext cx="1188720" cy="155448"/>
+          </a:xfrm>
+          <a:prstGeom prst="rect">
+            <a:avLst/>
+          </a:prstGeom>
+          <a:noFill/>
+        </p:spPr>
+        <p:txBody>
+          <a:bodyPr wrap="square" lIns="0" rIns="0" tIns="0" bIns="0">
+            <a:spAutoFit/>
+          </a:bodyPr>
+          <a:lstStyle/>
+          <a:p>
+            <a:pPr algn="ctr"/>
+            <a:r>
+              <a:rPr sz="750" b="0">
+                <a:solidFill>
+                  <a:srgbClr val="778B90"/>
+                </a:solidFill>
+                <a:latin typeface="Arial"/>
+              </a:rPr>
+              <a:t>writes frames</a:t>
+            </a:r>
+          </a:p>
+        </p:txBody>
+      </p:sp>
+      <p:cxnSp>
+        <p:nvCxnSpPr>
+          <p:cNvPr id="53" name="Connector 52"/>
+          <p:cNvCxnSpPr/>
+          <p:nvPr/>
+        </p:nvCxnSpPr>
+        <p:spPr>
+          <a:xfrm>
+            <a:off x="5989320" y="3803904"/>
+            <a:ext cx="822960" cy="813816"/>
+          </a:xfrm>
+          <a:prstGeom prst="line">
+            <a:avLst/>
+          </a:prstGeom>
+          <a:ln w="15875">
+            <a:solidFill>
+              <a:srgbClr val="A88BFF"/>
+            </a:solidFill>
+            <a:prstDash val="sysDash"/>
+            <a:tailEnd type="triangle" w="sm" len="sm"/>
+          </a:ln>
+          <a:effectLst/>
+        </p:spPr>
+        <p:style>
+          <a:lnRef idx="2">
+            <a:schemeClr val="accent1"/>
+          </a:lnRef>
+          <a:fillRef idx="0">
+            <a:schemeClr val="accent1"/>
+          </a:fillRef>
+          <a:effectRef idx="1">
+            <a:schemeClr val="accent1"/>
+          </a:effectRef>
+          <a:fontRef idx="minor">
+            <a:schemeClr val="tx1"/>
+          </a:fontRef>
+        </p:style>
+      </p:cxnSp>
+      <p:sp>
+        <p:nvSpPr>
+          <p:cNvPr id="54" name="TextBox 53"/>
+          <p:cNvSpPr txBox="1"/>
+          <p:nvPr/>
+        </p:nvSpPr>
+        <p:spPr>
+          <a:xfrm>
+            <a:off x="6053328" y="3858768"/>
+            <a:ext cx="1325880" cy="155448"/>
+          </a:xfrm>
+          <a:prstGeom prst="rect">
+            <a:avLst/>
+          </a:prstGeom>
+          <a:noFill/>
+        </p:spPr>
+        <p:txBody>
+          <a:bodyPr wrap="square" lIns="0" rIns="0" tIns="0" bIns="0">
+            <a:spAutoFit/>
+          </a:bodyPr>
+          <a:lstStyle/>
+          <a:p>
+            <a:pPr algn="ctr"/>
+            <a:r>
+              <a:rPr sz="750" b="0">
+                <a:solidFill>
+                  <a:srgbClr val="778B90"/>
+                </a:solidFill>
+                <a:latin typeface="Arial"/>
+              </a:rPr>
+              <a:t>config-bound ports</a:t>
+            </a:r>
+          </a:p>
+        </p:txBody>
+      </p:sp>
+      <p:sp>
+        <p:nvSpPr>
+          <p:cNvPr id="55" name="TextBox 54"/>
+          <p:cNvSpPr txBox="1"/>
+          <p:nvPr/>
+        </p:nvSpPr>
+        <p:spPr>
+          <a:xfrm>
+            <a:off x="685800" y="5504688"/>
+            <a:ext cx="10817352" cy="347472"/>
+          </a:xfrm>
+          <a:prstGeom prst="rect">
+            <a:avLst/>
+          </a:prstGeom>
+          <a:noFill/>
+        </p:spPr>
+        <p:txBody>
+          <a:bodyPr wrap="square" lIns="0" rIns="0" tIns="0" bIns="0">
+            <a:spAutoFit/>
+          </a:bodyPr>
+          <a:lstStyle/>
+          <a:p>
+            <a:pPr algn="ctr"/>
+            <a:r>
+              <a:rPr sz="1600" b="1">
+                <a:solidFill>
+                  <a:srgbClr val="47C6B7"/>
+                </a:solidFill>
+                <a:latin typeface="Arial"/>
+              </a:rPr>
+              <a:t>Only Postgres is the truth. Delete Neo4j and Meilisearch and one command rebuilds them from it.</a:t>
+            </a:r>
+          </a:p>
+        </p:txBody>
+      </p:sp>
+      <p:sp>
+        <p:nvSpPr>
+          <p:cNvPr id="56" name="TextBox 55"/>
+          <p:cNvSpPr txBox="1"/>
+          <p:nvPr/>
+        </p:nvSpPr>
+        <p:spPr>
+          <a:xfrm>
+            <a:off x="685800" y="5897880"/>
+            <a:ext cx="10817352" cy="256032"/>
+          </a:xfrm>
+          <a:prstGeom prst="rect">
+            <a:avLst/>
+          </a:prstGeom>
+          <a:noFill/>
+        </p:spPr>
+        <p:txBody>
+          <a:bodyPr wrap="square" lIns="0" rIns="0" tIns="0" bIns="0">
+            <a:spAutoFit/>
+          </a:bodyPr>
+          <a:lstStyle/>
+          <a:p>
+            <a:pPr algn="ctr"/>
+            <a:r>
+              <a:rPr sz="1200" b="0">
                 <a:solidFill>
                   <a:srgbClr val="8AA0A4"/>
                 </a:solidFill>
                 <a:latin typeface="Arial"/>
               </a:rPr>
-              <a:t>That is why swapping an AI model, or losing a database, is never a crisis.</a:t>
+              <a:t>Swap any AI model and no other box changes — that is the whole reason they attach in one place.</a:t>
             </a:r>
           </a:p>
         </p:txBody>
